--- a/HEALTHY LIFE STYLE-Group-7.pptx
+++ b/HEALTHY LIFE STYLE-Group-7.pptx
@@ -226,7 +226,7 @@
           <a:p>
             <a:fld id="{043B725B-653D-4166-A8E9-72A38A1847CF}" type="datetimeFigureOut">
               <a:rPr lang="en-US"/>
-              <a:t>3/31/2024</a:t>
+              <a:t>9/9/2024</a:t>
             </a:fld>
             <a:endParaRPr/>
           </a:p>
@@ -391,7 +391,7 @@
           <a:p>
             <a:fld id="{783F64CD-0576-4A9A-BD06-7889D6E60BDC}" type="datetimeFigureOut">
               <a:rPr lang="en-US"/>
-              <a:t>3/31/2024</a:t>
+              <a:t>9/9/2024</a:t>
             </a:fld>
             <a:endParaRPr/>
           </a:p>
@@ -829,7 +829,7 @@
           <a:p>
             <a:fld id="{64FDB73E-C6BA-44A8-B997-A9065A1E05AE}" type="datetime1">
               <a:rPr lang="en-US" smtClean="0"/>
-              <a:t>3/31/2024</a:t>
+              <a:t>9/9/2024</a:t>
             </a:fld>
             <a:endParaRPr lang="en-US" dirty="0"/>
           </a:p>
@@ -1016,7 +1016,7 @@
           <a:p>
             <a:fld id="{233E0B78-32BC-4E8C-9230-BCDD7976430A}" type="datetime1">
               <a:rPr lang="en-US" smtClean="0"/>
-              <a:t>3/31/2024</a:t>
+              <a:t>9/9/2024</a:t>
             </a:fld>
             <a:endParaRPr lang="en-US"/>
           </a:p>
@@ -1251,7 +1251,7 @@
           <a:p>
             <a:fld id="{57FB8977-B1F2-40C1-93C8-9142AF3B2B17}" type="datetime1">
               <a:rPr lang="en-US" smtClean="0"/>
-              <a:t>3/31/2024</a:t>
+              <a:t>9/9/2024</a:t>
             </a:fld>
             <a:endParaRPr lang="en-US"/>
           </a:p>
@@ -1443,7 +1443,7 @@
           <a:p>
             <a:fld id="{13127F69-9E7E-46E3-86C9-A4FAAB96C04C}" type="datetime1">
               <a:rPr lang="en-US" smtClean="0"/>
-              <a:t>3/31/2024</a:t>
+              <a:t>9/9/2024</a:t>
             </a:fld>
             <a:endParaRPr lang="en-US"/>
           </a:p>
@@ -1761,7 +1761,7 @@
           <a:p>
             <a:fld id="{39F63248-C34D-47B2-8E5F-87E72234AC97}" type="datetime1">
               <a:rPr lang="en-US" smtClean="0"/>
-              <a:t>3/31/2024</a:t>
+              <a:t>9/9/2024</a:t>
             </a:fld>
             <a:endParaRPr lang="en-US" dirty="0"/>
           </a:p>
@@ -2078,7 +2078,7 @@
           <a:p>
             <a:fld id="{0F27D655-AF97-4D32-AF5D-7CCB36E4F628}" type="datetime1">
               <a:rPr lang="en-US" smtClean="0"/>
-              <a:t>3/31/2024</a:t>
+              <a:t>9/9/2024</a:t>
             </a:fld>
             <a:endParaRPr lang="en-US"/>
           </a:p>
@@ -2512,7 +2512,7 @@
           <a:p>
             <a:fld id="{A5D5053E-ED82-4D6F-8497-0988C3A5DAF9}" type="datetime1">
               <a:rPr lang="en-US" smtClean="0"/>
-              <a:t>3/31/2024</a:t>
+              <a:t>9/9/2024</a:t>
             </a:fld>
             <a:endParaRPr lang="en-US"/>
           </a:p>
@@ -2642,7 +2642,7 @@
           <a:p>
             <a:fld id="{DB30595E-A882-4821-8B0E-918136657C2A}" type="datetime1">
               <a:rPr lang="en-US" smtClean="0"/>
-              <a:t>3/31/2024</a:t>
+              <a:t>9/9/2024</a:t>
             </a:fld>
             <a:endParaRPr lang="en-US"/>
           </a:p>
@@ -2749,7 +2749,7 @@
           <a:p>
             <a:fld id="{DE03D27A-4A8C-467A-B546-85AFFA97462F}" type="datetime1">
               <a:rPr lang="en-US" smtClean="0"/>
-              <a:t>3/31/2024</a:t>
+              <a:t>9/9/2024</a:t>
             </a:fld>
             <a:endParaRPr lang="en-US"/>
           </a:p>
@@ -3034,7 +3034,7 @@
           <a:p>
             <a:fld id="{50EF9113-05AA-4BA1-B607-FABBCF94FF64}" type="datetime1">
               <a:rPr lang="en-US" smtClean="0"/>
-              <a:t>3/31/2024</a:t>
+              <a:t>9/9/2024</a:t>
             </a:fld>
             <a:endParaRPr lang="en-US" dirty="0"/>
           </a:p>
@@ -3311,7 +3311,7 @@
           <a:p>
             <a:fld id="{FF11C716-5BC2-4BA6-80AE-D0B37BA8823A}" type="datetime1">
               <a:rPr lang="en-US" smtClean="0"/>
-              <a:t>3/31/2024</a:t>
+              <a:t>9/9/2024</a:t>
             </a:fld>
             <a:endParaRPr lang="en-US" dirty="0"/>
           </a:p>
@@ -3572,7 +3572,7 @@
           <a:p>
             <a:fld id="{3BC6EF7D-2AEE-4105-AFEA-E180CC491B81}" type="datetime1">
               <a:rPr lang="en-US" smtClean="0"/>
-              <a:t>3/31/2024</a:t>
+              <a:t>9/9/2024</a:t>
             </a:fld>
             <a:endParaRPr lang="en-US" dirty="0"/>
           </a:p>
@@ -5167,7 +5167,21 @@
                 <a:latin typeface="Times New Roman" panose="02020603050405020304" pitchFamily="18" charset="0"/>
                 <a:cs typeface="Times New Roman" panose="02020603050405020304" pitchFamily="18" charset="0"/>
               </a:rPr>
-              <a:t>KPTMYK-001298  			MG MIN HAN SET NAING</a:t>
+              <a:t>KPTMYK-001298  	</a:t>
+            </a:r>
+            <a:r>
+              <a:rPr lang="en-US" sz="1800">
+                <a:latin typeface="Times New Roman" panose="02020603050405020304" pitchFamily="18" charset="0"/>
+                <a:cs typeface="Times New Roman" panose="02020603050405020304" pitchFamily="18" charset="0"/>
+              </a:rPr>
+              <a:t>		MG </a:t>
+            </a:r>
+            <a:r>
+              <a:rPr lang="en-US" sz="1800" dirty="0">
+                <a:latin typeface="Times New Roman" panose="02020603050405020304" pitchFamily="18" charset="0"/>
+                <a:cs typeface="Times New Roman" panose="02020603050405020304" pitchFamily="18" charset="0"/>
+              </a:rPr>
+              <a:t>MIN HAN SET NAING</a:t>
             </a:r>
           </a:p>
           <a:p>
